--- a/public/level4/downloads/slides/Level4_Lesson9_Slides.pptx
+++ b/public/level4/downloads/slides/Level4_Lesson9_Slides.pptx
@@ -1181,7 +1181,7 @@
           </a:p>
           <a:p>
             <a:r>
-              <a:t>No speaker? Read the script with a volunteer at a natural, friendly speed, two times. Say gonna and wanna where the script has them.</a:t>
+              <a:t>No speaker? Read the script with a volunteer at a natural, friendly speed, two times. The script says going to and want to. People often say gonna and wanna; learners only need to recognize those words.</a:t>
             </a:r>
           </a:p>
           <a:p>
@@ -1211,7 +1211,7 @@
           </a:p>
           <a:p>
             <a:r>
-              <a:t>Mrs. Okafor: Good evening, everyone. Thank you for coming. Tonight we wanna talk about the empty lot on Cedar Street. The city says we can choose a plan. Ray, what do you think about it?</a:t>
+              <a:t>Mrs. Okafor: Good evening, everyone. Thank you for coming. Tonight we want to talk about the empty lot on Cedar Street. The city says we can choose a plan. Ray, what do you think about it?</a:t>
             </a:r>
           </a:p>
           <a:p>
@@ -1241,7 +1241,7 @@
           </a:p>
           <a:p>
             <a:r>
-              <a:t>Ray: That's a good idea, but a garden is a lot of work. Who's gonna take care of it?</a:t>
+              <a:t>Ray: That's a good idea, but a garden is a lot of work. Who's going to take care of it?</a:t>
             </a:r>
           </a:p>
           <a:p>
@@ -1596,12 +1596,12 @@
           <a:lstStyle/>
           <a:p>
             <a:r>
-              <a:t>"Hear it, say it" (3 min): Point to the script lines. wanna = want to: "Tonight we wanna talk about the empty lot." gonna = going to: "Who's gonna take care of it?" Then practice I see your POINT, but… (the voice goes down on point, then a short pause) and the stress in It isn't as EXpensive. The class repeats the two lines twice.</a:t>
-            </a:r>
-          </a:p>
-          <a:p>
-            <a:r>
-              <a:t>Reductions: the listening has gonna and wanna. Learners need to understand them; they can always say going to and want to.</a:t>
+              <a:t>"Hear it, say it" (3 min): Point to the script lines. wanna = want to: "Tonight we want to talk about the empty lot." gonna = going to: "Who's going to take care of it?" Then practice I see your POINT, but… (the voice goes down on point, then a short pause) and the stress in It isn't as EXpensive. The class repeats the two lines twice.</a:t>
+            </a:r>
+          </a:p>
+          <a:p>
+            <a:r>
+              <a:t>Reductions: the listening says going to and want to. People often say gonna and wanna. Learners only need to recognize the short forms.</a:t>
             </a:r>
           </a:p>
           <a:p>
@@ -16374,6 +16374,17 @@
               <a:buNone/>
             </a:pPr>
             <a:r>
+              <a:rPr lang="en-US" sz="2000" dirty="0" b="1">
+                <a:solidFill>
+                  <a:srgbClr val="5B3FC4"/>
+                </a:solidFill>
+                <a:latin typeface="Lexend Deca" pitchFamily="34" charset="0"/>
+                <a:ea typeface="Lexend Deca" pitchFamily="34" charset="-122"/>
+                <a:cs typeface="Lexend Deca" pitchFamily="34" charset="-120"/>
+              </a:rPr>
+              <a:t>gonna</a:t>
+            </a:r>
+            <a:r>
               <a:rPr lang="en-US" sz="2000" dirty="0">
                 <a:solidFill>
                   <a:srgbClr val="1B2236"/>
@@ -16382,7 +16393,7 @@
                 <a:ea typeface="Lexend Deca" pitchFamily="34" charset="-122"/>
                 <a:cs typeface="Lexend Deca" pitchFamily="34" charset="-120"/>
               </a:rPr>
-              <a:t>You will hear </a:t>
+              <a:t> and </a:t>
             </a:r>
             <a:r>
               <a:rPr lang="en-US" sz="2000" dirty="0" b="1">
@@ -16393,7 +16404,7 @@
                 <a:ea typeface="Lexend Deca" pitchFamily="34" charset="-122"/>
                 <a:cs typeface="Lexend Deca" pitchFamily="34" charset="-120"/>
               </a:rPr>
-              <a:t>gonna</a:t>
+              <a:t>wanna</a:t>
             </a:r>
             <a:r>
               <a:rPr lang="en-US" sz="2000" dirty="0">
@@ -16404,29 +16415,7 @@
                 <a:ea typeface="Lexend Deca" pitchFamily="34" charset="-122"/>
                 <a:cs typeface="Lexend Deca" pitchFamily="34" charset="-120"/>
               </a:rPr>
-              <a:t> and </a:t>
-            </a:r>
-            <a:r>
-              <a:rPr lang="en-US" sz="2000" dirty="0" b="1">
-                <a:solidFill>
-                  <a:srgbClr val="5B3FC4"/>
-                </a:solidFill>
-                <a:latin typeface="Lexend Deca" pitchFamily="34" charset="0"/>
-                <a:ea typeface="Lexend Deca" pitchFamily="34" charset="-122"/>
-                <a:cs typeface="Lexend Deca" pitchFamily="34" charset="-120"/>
-              </a:rPr>
-              <a:t>wanna</a:t>
-            </a:r>
-            <a:r>
-              <a:rPr lang="en-US" sz="2000" dirty="0">
-                <a:solidFill>
-                  <a:srgbClr val="1B2236"/>
-                </a:solidFill>
-                <a:latin typeface="Lexend Deca" pitchFamily="34" charset="0"/>
-                <a:ea typeface="Lexend Deca" pitchFamily="34" charset="-122"/>
-                <a:cs typeface="Lexend Deca" pitchFamily="34" charset="-120"/>
-              </a:rPr>
-              <a:t>.</a:t>
+              <a:t> are short forms. This listening uses the full forms.</a:t>
             </a:r>
             <a:endParaRPr lang="en-US" sz="2000" dirty="0"/>
           </a:p>
@@ -16603,7 +16592,7 @@
                 <a:ea typeface="Lexend Deca" pitchFamily="34" charset="-122"/>
                 <a:cs typeface="Lexend Deca" pitchFamily="34" charset="-120"/>
               </a:rPr>
-              <a:t>wanna</a:t>
+              <a:t>want to</a:t>
             </a:r>
             <a:r>
               <a:rPr lang="en-US" sz="1800" dirty="0" b="1">
@@ -16690,7 +16679,7 @@
                 <a:ea typeface="Lexend Deca" pitchFamily="34" charset="-122"/>
                 <a:cs typeface="Lexend Deca" pitchFamily="34" charset="-120"/>
               </a:rPr>
-              <a:t>gonna</a:t>
+              <a:t>going to</a:t>
             </a:r>
             <a:r>
               <a:rPr lang="en-US" sz="1800" dirty="0" b="1">

--- a/public/level4/downloads/slides/Level4_Lesson9_Slides.pptx
+++ b/public/level4/downloads/slides/Level4_Lesson9_Slides.pptx
@@ -1166,12 +1166,12 @@
           </a:p>
           <a:p>
             <a:r>
-              <a:t>Before you listen (2 min). Say: "Neighbors are at a community meeting. Mrs. Okafor is the leader. Ray and Lin give their opinions about the empty lot on Cedar Street. Listen: what are they deciding?"</a:t>
-            </a:r>
-          </a:p>
-          <a:p>
-            <a:r>
-              <a:t>There are 3 people: Mrs. Okafor, Ray and Lin. A narrator starts and ends the listening. Each click highlights the next person.</a:t>
+              <a:t>Before you listen (2 min). Say: "Neighbors are at a community meeting. Mrs. Okafor is the leader. Ray and Lynn give their opinions about the empty lot on Cedar Street. Listen: what are they deciding?"</a:t>
+            </a:r>
+          </a:p>
+          <a:p>
+            <a:r>
+              <a:t>There are 3 people: Mrs. Okafor, Ray and Lynn. A narrator starts and ends the listening. Each click highlights the next person.</a:t>
             </a:r>
           </a:p>
           <a:p>
@@ -1211,7 +1211,7 @@
           </a:p>
           <a:p>
             <a:r>
-              <a:t>Mrs. Okafor: Good evening, everyone. Thank you for coming. Tonight we want to talk about the empty lot on Cedar Street. The city says we can choose a plan. Ray, what do you think about it?</a:t>
+              <a:t>Mrs. Okafor: Good evening, everyone, and welcome. Thank you for coming. Tonight we want to talk about the empty lot on Cedar Street. The city says we can choose a plan. Ray, what do you think about it?</a:t>
             </a:r>
           </a:p>
           <a:p>
@@ -1221,12 +1221,12 @@
           </a:p>
           <a:p>
             <a:r>
-              <a:t>Mrs. Okafor: That's true. Parking is a big problem. Lin, how do you feel about it?</a:t>
-            </a:r>
-          </a:p>
-          <a:p>
-            <a:r>
-              <a:t>Lin: I see your point, Ray, but I'm not sure I agree. I think a community garden is a better idea.</a:t>
+              <a:t>Mrs. Okafor: Yes, the parking problem is serious. Lynn, how do you feel about it?</a:t>
+            </a:r>
+          </a:p>
+          <a:p>
+            <a:r>
+              <a:t>Lynn: I see your point, Ray, but I'm not sure I agree. I think a community garden is a better idea.</a:t>
             </a:r>
           </a:p>
           <a:p>
@@ -1236,7 +1236,7 @@
           </a:p>
           <a:p>
             <a:r>
-              <a:t>Lin: First, a garden isn't as expensive as a parking lot. Also, if we had a garden, families would grow vegetables, and kids would spend more time outside.</a:t>
+              <a:t>Lynn: First, a garden isn't as expensive as a parking lot. Also, if we had a garden, families would grow vegetables, and kids would spend more time outside.</a:t>
             </a:r>
           </a:p>
           <a:p>
@@ -1246,7 +1246,7 @@
           </a:p>
           <a:p>
             <a:r>
-              <a:t>Lin: I'd help, and I think many neighbors would help too.</a:t>
+              <a:t>Lynn: I'd help, and I think many neighbors would help too.</a:t>
             </a:r>
           </a:p>
           <a:p>
@@ -1266,7 +1266,7 @@
           </a:p>
           <a:p>
             <a:r>
-              <a:t>Lin: I agree. That's fair.</a:t>
+              <a:t>Lynn: I agree. That's fair.</a:t>
             </a:r>
           </a:p>
           <a:p>
@@ -11411,7 +11411,7 @@
                 <a:ea typeface="Lexend Deca" pitchFamily="34" charset="-122"/>
                 <a:cs typeface="Lexend Deca" pitchFamily="34" charset="-120"/>
               </a:rPr>
-              <a:t>Neighbors are at a community meeting. Mrs. Okafor is the leader. Ray and Lin give their opinions about the empty lot on Cedar Street.</a:t>
+              <a:t>Neighbors are at a community meeting. Mrs. Okafor is the leader. Ray and Lynn give their opinions about the empty lot on Cedar Street.</a:t>
             </a:r>
             <a:endParaRPr lang="en-US" sz="1600" dirty="0"/>
           </a:p>
@@ -11876,7 +11876,7 @@
                 <a:ea typeface="Lexend Deca" pitchFamily="34" charset="-122"/>
                 <a:cs typeface="Lexend Deca" pitchFamily="34" charset="-120"/>
               </a:rPr>
-              <a:t>Lin</a:t>
+              <a:t>Lynn</a:t>
             </a:r>
             <a:endParaRPr lang="en-US" sz="2200" dirty="0" b="1"/>
           </a:p>
@@ -13462,7 +13462,7 @@
             </a:pPr>
             <a:r>
               <a:rPr lang="en-US" sz="1600" dirty="0"/>
-              <a:t>3. Lin wants</a:t>
+              <a:t>3. Lynn wants</a:t>
             </a:r>
             <a:endParaRPr lang="en-US" sz="1600" dirty="0"/>
           </a:p>
@@ -13637,7 +13637,7 @@
             </a:pPr>
             <a:r>
               <a:rPr lang="en-US" sz="1600" dirty="0"/>
-              <a:t>4. Lin's first reason: a garden ____ a parking lot.</a:t>
+              <a:t>4. Lynn's first reason: a garden ____ a parking lot.</a:t>
             </a:r>
             <a:endParaRPr lang="en-US" sz="1600" dirty="0"/>
           </a:p>
@@ -18409,7 +18409,7 @@
                 <a:ea typeface="Lexend Deca" pitchFamily="34" charset="-122"/>
                 <a:cs typeface="Lexend Deca" pitchFamily="34" charset="-120"/>
               </a:rPr>
-              <a:t> with Lin?</a:t>
+              <a:t> with Lynn?</a:t>
             </a:r>
             <a:endParaRPr lang="en-US" sz="1700" dirty="0" b="1"/>
           </a:p>
@@ -23165,7 +23165,7 @@
             </a:pPr>
             <a:r>
               <a:rPr lang="en-US" sz="1600" dirty="0"/>
-              <a:t>1. ____ with Lin.</a:t>
+              <a:t>1. ____ with Lynn.</a:t>
             </a:r>
             <a:endParaRPr lang="en-US" sz="1600" dirty="0"/>
           </a:p>
@@ -31046,7 +31046,7 @@
                 <a:ea typeface="Lexend Deca" pitchFamily="34" charset="-122"/>
                 <a:cs typeface="Lexend Deca" pitchFamily="34" charset="-120"/>
               </a:rPr>
-              <a:t>Mrs. Okafor, Ray, Lin, and Maria are invented names. The listening story is invented.</a:t>
+              <a:t>Mrs. Okafor, Ray, Lynn, and Maria are invented names. The listening story is invented.</a:t>
             </a:r>
             <a:endParaRPr lang="en-US" sz="1600" dirty="0" b="0"/>
           </a:p>

--- a/public/level4/downloads/slides/Level4_Lesson9_Slides.pptx
+++ b/public/level4/downloads/slides/Level4_Lesson9_Slides.pptx
@@ -1176,7 +1176,7 @@
           </a:p>
           <a:p>
             <a:r>
-              <a:t>The audio (about 1:48) is coming soon. When it is ready, it plays the conversation once; press play again for play 2. Until then, read the listening script (at the end of these notes) with a volunteer.</a:t>
+              <a:t>The audio (L4_L9_listening.mp3, about 1:48) plays the conversation once. Press play again for play 2. A third play is fine if the class needs it.</a:t>
             </a:r>
           </a:p>
           <a:p>
@@ -1186,7 +1186,7 @@
           </a:p>
           <a:p>
             <a:r>
-              <a:t>Audio: the listening audio for this lesson (about 1:48) is coming soon. It will use computer-generated voices (Chatterbox TTS cloned from synthetic Kokoro-82M reference clips); no recordings of real people. Until it is ready, read the listening script (in the notes of the Before You Listen slide) with a volunteer. The names and the story are invented.</a:t>
+              <a:t>Audio: synthetic voices, computer-generated (Chatterbox TTS cloned from Kokoro-82M reference clips). No recordings of real people. The names and the story are invented.</a:t>
             </a:r>
           </a:p>
           <a:p>
@@ -1197,91 +1197,6 @@
           <a:p>
             <a:r>
               <a:t>Picture: Twemoji graphics by Twitter, Inc. and other contributors (https://github.com/jdecked/twemoji), CC BY 4.0 (https://creativecommons.org/licenses/by/4.0/); resized and combined, with signs and labels (images/CREDITS.md).</a:t>
-            </a:r>
-          </a:p>
-          <a:p>
-            <a:r>
-              <a:t>Listening script (the audio is coming soon; until then, read it aloud with a volunteer at a normal, friendly speed):</a:t>
-            </a:r>
-          </a:p>
-          <a:p>
-            <a:r>
-              <a:t>Narrator: Lesson nine. Neighbors are at a community meeting. They are talking about the empty lot on Cedar Street.</a:t>
-            </a:r>
-          </a:p>
-          <a:p>
-            <a:r>
-              <a:t>Mrs. Okafor: Good evening, everyone, and welcome. Thank you for coming. Tonight we want to talk about the empty lot on Cedar Street. The city says we can choose a plan. Ray, what do you think about it?</a:t>
-            </a:r>
-          </a:p>
-          <a:p>
-            <a:r>
-              <a:t>Ray: Thanks, Mrs. Okafor. In my opinion, we need a parking lot. There aren't enough parking spaces on our street. I drive around for twenty minutes every night.</a:t>
-            </a:r>
-          </a:p>
-          <a:p>
-            <a:r>
-              <a:t>Mrs. Okafor: Yes, the parking problem is serious. Lynn, how do you feel about it?</a:t>
-            </a:r>
-          </a:p>
-          <a:p>
-            <a:r>
-              <a:t>Lynn: I see your point, Ray, but I'm not sure I agree. I think a community garden is a better idea.</a:t>
-            </a:r>
-          </a:p>
-          <a:p>
-            <a:r>
-              <a:t>Ray: A garden? Why?</a:t>
-            </a:r>
-          </a:p>
-          <a:p>
-            <a:r>
-              <a:t>Lynn: First, a garden isn't as expensive as a parking lot. Also, if we had a garden, families would grow vegetables, and kids would spend more time outside.</a:t>
-            </a:r>
-          </a:p>
-          <a:p>
-            <a:r>
-              <a:t>Ray: That's a good idea, but a garden is a lot of work. Who's going to take care of it?</a:t>
-            </a:r>
-          </a:p>
-          <a:p>
-            <a:r>
-              <a:t>Lynn: I'd help, and I think many neighbors would help too.</a:t>
-            </a:r>
-          </a:p>
-          <a:p>
-            <a:r>
-              <a:t>Mrs. Okafor: Ray, do you agree with that?</a:t>
-            </a:r>
-          </a:p>
-          <a:p>
-            <a:r>
-              <a:t>Ray: Well, I agree that a garden is nice. But for me, parking is as important as a garden.</a:t>
-            </a:r>
-          </a:p>
-          <a:p>
-            <a:r>
-              <a:t>Mrs. Okafor: OK. Those are two good ideas. Let's do a survey. We'll ask every neighbor on Cedar Street.</a:t>
-            </a:r>
-          </a:p>
-          <a:p>
-            <a:r>
-              <a:t>Lynn: I agree. That's fair.</a:t>
-            </a:r>
-          </a:p>
-          <a:p>
-            <a:r>
-              <a:t>Ray: Yes, that's a good plan. I'll help with the survey.</a:t>
-            </a:r>
-          </a:p>
-          <a:p>
-            <a:r>
-              <a:t>Mrs. Okafor: Great. We'll vote at the next meeting, on May twelfth. Thank you, everyone.</a:t>
-            </a:r>
-          </a:p>
-          <a:p>
-            <a:r>
-              <a:t>Narrator: That's the end of the listening.</a:t>
             </a:r>
           </a:p>
         </p:txBody>
@@ -2761,7 +2676,7 @@
           </a:p>
           <a:p>
             <a:r>
-              <a:t>Audio: the listening audio for this lesson (about 1:48) is coming soon. It will use computer-generated voices (Chatterbox TTS cloned from synthetic Kokoro-82M reference clips); no recordings of real people. Until it is ready, read the listening script (in the notes of the Before You Listen slide) with a volunteer. The names and the story are invented.</a:t>
+              <a:t>Audio: synthetic voices, computer-generated (Chatterbox TTS cloned from Kokoro-82M reference clips). No recordings of real people. The names and the story are invented.</a:t>
             </a:r>
           </a:p>
           <a:p>
@@ -12048,7 +11963,7 @@
                 <a:ea typeface="Lexend Deca" pitchFamily="34" charset="-122"/>
                 <a:cs typeface="Lexend Deca" pitchFamily="34" charset="-120"/>
               </a:rPr>
-              <a:t>Audio (about 1:48): coming soon.</a:t>
+              <a:t>Audio: about 1:48. It plays once.</a:t>
             </a:r>
             <a:endParaRPr lang="en-US" sz="2200" dirty="0"/>
           </a:p>
@@ -31116,7 +31031,7 @@
                 <a:ea typeface="Lexend Deca" pitchFamily="34" charset="-122"/>
                 <a:cs typeface="Lexend Deca" pitchFamily="34" charset="-120"/>
               </a:rPr>
-              <a:t>Audio (coming soon): synthetic voices made with Chatterbox TTS (MIT License), cloned from short synthetic reference clips made with Kokoro-82M (Apache License 2.0). No recordings of real people. Each file will carry an inaudible Perth watermark marking it as AI-generated. Font: Lexend Deca (OFL 1.1).</a:t>
+              <a:t>Audio: synthetic voices made with Chatterbox TTS (MIT License), cloned from short synthetic reference clips made with Kokoro-82M (Apache License 2.0). No recordings of real people were used. Each file carries an inaudible Perth watermark marking it as AI-generated. Font: Lexend Deca (OFL 1.1).</a:t>
             </a:r>
             <a:endParaRPr lang="en-US" sz="1350" dirty="0" b="0"/>
           </a:p>

--- a/public/level4/downloads/slides/Level4_Lesson9_Slides.pptx
+++ b/public/level4/downloads/slides/Level4_Lesson9_Slides.pptx
@@ -1517,6 +1517,11 @@
           <a:p>
             <a:r>
               <a:t>Reductions: the listening says going to and want to. People often say gonna and wanna. Learners only need to recognize the short forms.</a:t>
+            </a:r>
+          </a:p>
+          <a:p>
+            <a:r>
+              <a:t>Everyday English: people often say gonna (going to) and wanna (want to). Learners will hear them often. They are fine in casual talk; in writing, at a job interview, or in a formal email, use going to and want to. The listening uses the full forms.</a:t>
             </a:r>
           </a:p>
           <a:p>
@@ -16308,7 +16313,7 @@
                 <a:ea typeface="Lexend Deca" pitchFamily="34" charset="-122"/>
                 <a:cs typeface="Lexend Deca" pitchFamily="34" charset="-120"/>
               </a:rPr>
-              <a:t> and </a:t>
+              <a:t> = going to, </a:t>
             </a:r>
             <a:r>
               <a:rPr lang="en-US" sz="2000" dirty="0" b="1">
@@ -16330,7 +16335,7 @@
                 <a:ea typeface="Lexend Deca" pitchFamily="34" charset="-122"/>
                 <a:cs typeface="Lexend Deca" pitchFamily="34" charset="-120"/>
               </a:rPr>
-              <a:t> are short forms. This listening uses the full forms.</a:t>
+              <a:t> = want to: fine in everyday talk.</a:t>
             </a:r>
             <a:endParaRPr lang="en-US" sz="2000" dirty="0"/>
           </a:p>
